--- a/docs/ecostats_lectures/lecture_02/02_01_lecture_powerpoint.pptx
+++ b/docs/ecostats_lectures/lecture_02/02_01_lecture_powerpoint.pptx
@@ -3763,8 +3763,8 @@
               <a:buNone/>
             </a:pPr>
             <a:r>
-              <a:rPr/>
-              <a:t>A good way to organize script files is number them in the order they get run.</a:t>
+              <a:rPr b="1"/>
+              <a:t>A useful way to organize script files is number them in the order they get run.</a:t>
             </a:r>
           </a:p>
         </p:txBody>
@@ -5823,8 +5823,8 @@
         </p:blipFill>
         <p:spPr bwMode="auto">
           <a:xfrm>
-            <a:off x="6121400" y="1778000"/>
-            <a:ext cx="2781300" cy="2222500"/>
+            <a:off x="6121400" y="2044700"/>
+            <a:ext cx="2781300" cy="1714500"/>
           </a:xfrm>
           <a:prstGeom prst="rect">
             <a:avLst/>
@@ -6002,8 +6002,8 @@
         </p:blipFill>
         <p:spPr bwMode="auto">
           <a:xfrm>
-            <a:off x="6121400" y="1778000"/>
-            <a:ext cx="2781300" cy="2222500"/>
+            <a:off x="6121400" y="2044700"/>
+            <a:ext cx="2781300" cy="1714500"/>
           </a:xfrm>
           <a:prstGeom prst="rect">
             <a:avLst/>
@@ -6326,8 +6326,8 @@
         </p:blipFill>
         <p:spPr bwMode="auto">
           <a:xfrm>
-            <a:off x="6121400" y="1778000"/>
-            <a:ext cx="2781300" cy="2222500"/>
+            <a:off x="6121400" y="2044700"/>
+            <a:ext cx="2781300" cy="1714500"/>
           </a:xfrm>
           <a:prstGeom prst="rect">
             <a:avLst/>
@@ -6476,7 +6476,7 @@
             <a:pPr lvl="1"/>
             <a:r>
               <a:rPr/>
-              <a:t>Too many gridlines</a:t>
+              <a:t>Too many grid lines</a:t>
             </a:r>
           </a:p>
           <a:p>
@@ -6579,8 +6579,8 @@
         </p:blipFill>
         <p:spPr bwMode="auto">
           <a:xfrm>
-            <a:off x="6121400" y="1231900"/>
-            <a:ext cx="2781300" cy="3340100"/>
+            <a:off x="6121400" y="2044700"/>
+            <a:ext cx="2781300" cy="1714500"/>
           </a:xfrm>
           <a:prstGeom prst="rect">
             <a:avLst/>
@@ -8698,7 +8698,35 @@
             </a:pPr>
             <a:r>
               <a:rPr sz="2000"/>
-              <a:t>Let’s examine our pine needle data: - What naming conventions did you choose? - How did you organize the data? - How can you verify data formats (numeric vs categorical)? - What’s your plan for organizing outputs and figures?</a:t>
+              <a:t>Let’s examine our pine needle data:</a:t>
+            </a:r>
+          </a:p>
+          <a:p>
+            <a:pPr lvl="0"/>
+            <a:r>
+              <a:rPr sz="2000"/>
+              <a:t>- What naming conventions did you choose?</a:t>
+            </a:r>
+          </a:p>
+          <a:p>
+            <a:pPr lvl="0"/>
+            <a:r>
+              <a:rPr sz="2000"/>
+              <a:t>- How did you organize the data?</a:t>
+            </a:r>
+          </a:p>
+          <a:p>
+            <a:pPr lvl="0"/>
+            <a:r>
+              <a:rPr sz="2000"/>
+              <a:t>- How can you verify data formats (numeric vs categorical)?</a:t>
+            </a:r>
+          </a:p>
+          <a:p>
+            <a:pPr lvl="0"/>
+            <a:r>
+              <a:rPr sz="2000"/>
+              <a:t>- What’s your plan for organizing outputs and figures?</a:t>
             </a:r>
           </a:p>
           <a:p>
